--- a/slides-en/04-negotiation.pptx
+++ b/slides-en/04-negotiation.pptx
@@ -608,48 +608,48 @@
           <a:lstStyle/>
           <a:p>
             <a:r>
-              <a:t>KẾT THÚC (3 phút)</a:t>
-            </a:r>
-          </a:p>
-          <a:p>
-            <a:r>
-              <a:t>• Tín hiệu chốt: đối phương hỏi chi tiết TRIỂN KHAI, thanh toán, thời gian giao hàng.</a:t>
-            </a:r>
-          </a:p>
-          <a:p>
-            <a:r>
-              <a:t>• Nhấn: TÓM TẮT VÀ VĂN BẢN HÓA NGAY — biên bản ghi nhớ hoặc hợp đồng.</a:t>
-            </a:r>
-          </a:p>
-          <a:p>
-            <a:r>
-              <a:t>• Sau đàm phán: thực hiện đúng cam kết, giữ quan hệ, rút kinh nghiệm.</a:t>
-            </a:r>
-          </a:p>
-          <a:p>
-            <a:r>
-              <a:t>• Câu chốt: "Đàm phán xong mà không có giấy tờ thì coi như chưa xong."''</a:t>
+              <a:t>CLOSING (3 minutes)</a:t>
+            </a:r>
+          </a:p>
+          <a:p>
+            <a:r>
+              <a:t>• The signal to close: they start asking about IMPLEMENTATION detail, payment, delivery dates.</a:t>
+            </a:r>
+          </a:p>
+          <a:p>
+            <a:r>
+              <a:t>• Press: SUMMARISE AND PUT IT IN WRITING AT ONCE — a memorandum or a contract.</a:t>
+            </a:r>
+          </a:p>
+          <a:p>
+            <a:r>
+              <a:t>• Afterwards: deliver what you promised, keep the relationship, take the lesson.</a:t>
+            </a:r>
+          </a:p>
+          <a:p>
+            <a:r>
+              <a:t>• The closing line: "A negotiation with no paperwork isn't finished."''</a:t>
             </a:r>
           </a:p>
           <a:p/>
           <a:p>
             <a:r>
-              <a:t>NÓI ĐỦ Ý (phần đã rút khỏi slide)</a:t>
-            </a:r>
-          </a:p>
-          <a:p>
-            <a:r>
-              <a:t>• Tín hiệu sẵn sàng chốt: đối phương hỏi chi tiết triển khai, điều khoản thanh toán, thời gian giao hàng.</a:t>
-            </a:r>
-          </a:p>
-          <a:p>
-            <a:r>
-              <a:t>• Văn bản hóa ngay: biên bản ghi nhớ, rồi hợp đồng đủ điều khoản cơ bản — kỹ thuật soạn thảo học ở Chương 5.</a:t>
-            </a:r>
-          </a:p>
-          <a:p>
-            <a:r>
-              <a:t>• Sau đàm phán: thực hiện đúng cam kết chính là vốn cho lần đàm phán sau.</a:t>
+              <a:t>THE FULL VERSION (moved off the slide)</a:t>
+            </a:r>
+          </a:p>
+          <a:p>
+            <a:r>
+              <a:t>• Signs they are ready to close: questions about implementation detail, payment terms, delivery dates.</a:t>
+            </a:r>
+          </a:p>
+          <a:p>
+            <a:r>
+              <a:t>• Put it in writing immediately: a memorandum, then a contract with all the basic clauses — the drafting technique is taught in Chapter 5.</a:t>
+            </a:r>
+          </a:p>
+          <a:p>
+            <a:r>
+              <a:t>• Afterwards: honouring what you agreed is the capital you bring to the next negotiation.</a:t>
             </a:r>
           </a:p>
         </p:txBody>
@@ -735,53 +735,53 @@
           <a:lstStyle/>
           <a:p>
             <a:r>
-              <a:t>KỸ NĂNG (3 phút)</a:t>
-            </a:r>
-          </a:p>
-          <a:p>
-            <a:r>
-              <a:t>• Nghe nhiều hơn nói; IM LẶNG ĐÚNG LÚC là vũ khí.</a:t>
-            </a:r>
-          </a:p>
-          <a:p>
-            <a:r>
-              <a:t>• Thuyết phục bằng NGÔN NGỮ LỢI ÍCH CỦA ĐỐI PHƯƠNG, kèm số liệu và tiền lệ.</a:t>
-            </a:r>
-          </a:p>
-          <a:p>
-            <a:r>
-              <a:t>• Kiểm soát cảm xúc: "tức giận là nhượng quyền kiểm soát cho đối phương".</a:t>
-            </a:r>
-          </a:p>
-          <a:p>
-            <a:r>
-              <a:t>• Êkíp: phân vai trưởng đoàn – chuyên môn – ghi chép; TUYỆT ĐỐI không mâu thuẫn nội bộ trước mặt đối tác.</a:t>
+              <a:t>SKILLS (3 minutes)</a:t>
+            </a:r>
+          </a:p>
+          <a:p>
+            <a:r>
+              <a:t>• Listen more than you speak; SILENCE AT THE RIGHT MOMENT is a weapon.</a:t>
+            </a:r>
+          </a:p>
+          <a:p>
+            <a:r>
+              <a:t>• Persuade in THE OTHER SIDE'S LANGUAGE OF INTEREST, with figures and precedent.</a:t>
+            </a:r>
+          </a:p>
+          <a:p>
+            <a:r>
+              <a:t>• Emotional control: "losing your temper hands them the controls".</a:t>
+            </a:r>
+          </a:p>
+          <a:p>
+            <a:r>
+              <a:t>• The team: assign a lead, a technical expert, a note-taker; NEVER disagree with each other in front of the counterpart.</a:t>
             </a:r>
           </a:p>
           <a:p/>
           <a:p>
             <a:r>
-              <a:t>NÓI ĐỦ Ý (phần đã rút khỏi slide)</a:t>
-            </a:r>
-          </a:p>
-          <a:p>
-            <a:r>
-              <a:t>• Im lặng đúng lúc: nhiều nhượng bộ xuất hiện chỉ vì đối phương không chịu được khoảng lặng.</a:t>
-            </a:r>
-          </a:p>
-          <a:p>
-            <a:r>
-              <a:t>• Thuyết phục bằng số liệu, tiền lệ, quy định khách quan — không tranh cãi cảm tính.</a:t>
-            </a:r>
-          </a:p>
-          <a:p>
-            <a:r>
-              <a:t>• Tách con người khỏi vấn đề; giữ bình tĩnh trước khiêu khích.</a:t>
-            </a:r>
-          </a:p>
-          <a:p>
-            <a:r>
-              <a:t>• Êkíp: phân vai trưởng đoàn – chuyên môn – ghi chép; thống nhất tín hiệu nội bộ trước.</a:t>
+              <a:t>THE FULL VERSION (moved off the slide)</a:t>
+            </a:r>
+          </a:p>
+          <a:p>
+            <a:r>
+              <a:t>• Silence at the right moment: many concessions appear simply because the other side can't bear the pause.</a:t>
+            </a:r>
+          </a:p>
+          <a:p>
+            <a:r>
+              <a:t>• Persuade with figures, precedent and objective rules — not with feeling.</a:t>
+            </a:r>
+          </a:p>
+          <a:p>
+            <a:r>
+              <a:t>• Separate the people from the problem; stay calm under provocation.</a:t>
+            </a:r>
+          </a:p>
+          <a:p>
+            <a:r>
+              <a:t>• The team: a lead, a technical expert, a note-taker; agree your private signals beforehand.</a:t>
             </a:r>
           </a:p>
         </p:txBody>
@@ -867,58 +867,58 @@
           <a:lstStyle/>
           <a:p>
             <a:r>
-              <a:t>CHIÊU TRÒ (4 phút) — SINH VIÊN RẤT HỨNG THÚ</a:t>
-            </a:r>
-          </a:p>
-          <a:p>
-            <a:r>
-              <a:t>• Điểm qua 5 chiêu: neo giá sốc, người tốt – kẻ xấu, thời hạn chót giả, CẮT LÁT SALAMI, đòi hỏi phút chót.</a:t>
-            </a:r>
-          </a:p>
-          <a:p>
-            <a:r>
-              <a:t>• Salami: giải thích kỹ vì hay gặp nhất — đòi thêm từng chút sau khi đã thỏa thuận. Ứng phó: GÓI TOÀN BỘ điều khoản lại.</a:t>
-            </a:r>
-          </a:p>
-          <a:p>
-            <a:r>
-              <a:t>• Đòi hỏi phút chót: ĐỊNH GIÁ yêu cầu đó và đòi đối ứng tương xứng, đừng chiều để cho xong.</a:t>
-            </a:r>
-          </a:p>
-          <a:p>
-            <a:r>
-              <a:t>• Hỏi lớp: ai từng bị "chốt gấp trong hôm nay" khi mua hàng online?</a:t>
+              <a:t>TACTICS (4 minutes) — STUDENTS ENJOY THIS</a:t>
+            </a:r>
+          </a:p>
+          <a:p>
+            <a:r>
+              <a:t>• Run through five: the shock anchor, good cop – bad cop, the false deadline, SALAMI SLICING, the last-minute demand.</a:t>
+            </a:r>
+          </a:p>
+          <a:p>
+            <a:r>
+              <a:t>• Salami: explain it carefully, it is the most common — asking for a little more after the deal is done. The answer: PACKAGE ALL THE TERMS together.</a:t>
+            </a:r>
+          </a:p>
+          <a:p>
+            <a:r>
+              <a:t>• The last-minute demand: PUT A PRICE on it and ask for something of equal value; don't just give in to be finished.</a:t>
+            </a:r>
+          </a:p>
+          <a:p>
+            <a:r>
+              <a:t>• Ask the class: who has been told "this price is only good today" buying something online?</a:t>
             </a:r>
           </a:p>
           <a:p/>
           <a:p>
             <a:r>
-              <a:t>NÓI ĐỦ Ý (phần đã rút khỏi slide)</a:t>
-            </a:r>
-          </a:p>
-          <a:p>
-            <a:r>
-              <a:t>• Neo giá sốc: bám vào tiêu chí khách quan, đừng vội điều chỉnh mục tiêu của mình.</a:t>
-            </a:r>
-          </a:p>
-          <a:p>
-            <a:r>
-              <a:t>• Người tốt – kẻ xấu: nhận diện rồi chỉ đàm phán trên nội dung.</a:t>
-            </a:r>
-          </a:p>
-          <a:p>
-            <a:r>
-              <a:t>• Thời hạn chót giả: kiểm chứng thực hư; có BATNA thì sẵn sàng rời bàn.</a:t>
-            </a:r>
-          </a:p>
-          <a:p>
-            <a:r>
-              <a:t>• Cắt lát salami: gói toàn bộ điều khoản lại — “điểm này mở thì cả gói mở”.</a:t>
-            </a:r>
-          </a:p>
-          <a:p>
-            <a:r>
-              <a:t>• Đòi hỏi phút chót: bình tĩnh định giá yêu cầu đó và đòi đối ứng tương xứng.</a:t>
+              <a:t>THE FULL VERSION (moved off the slide)</a:t>
+            </a:r>
+          </a:p>
+          <a:p>
+            <a:r>
+              <a:t>• The shock anchor: hold to objective criteria, don't move your own target in a hurry.</a:t>
+            </a:r>
+          </a:p>
+          <a:p>
+            <a:r>
+              <a:t>• Good cop – bad cop: name it to yourself, then negotiate only on substance.</a:t>
+            </a:r>
+          </a:p>
+          <a:p>
+            <a:r>
+              <a:t>• The false deadline: test whether it is real; with a BATNA in hand, be ready to leave the table.</a:t>
+            </a:r>
+          </a:p>
+          <a:p>
+            <a:r>
+              <a:t>• Salami slicing: package all the terms — “if that one opens, the whole package opens”.</a:t>
+            </a:r>
+          </a:p>
+          <a:p>
+            <a:r>
+              <a:t>• The last-minute demand: calmly put a price on it and ask for something of equal value.</a:t>
             </a:r>
           </a:p>
         </p:txBody>
@@ -1004,32 +1004,32 @@
           <a:lstStyle/>
           <a:p>
             <a:r>
-              <a:t>ROLE-PLAY (20 phút) — HOẠT ĐỘNG CHÍNH CỦA BUỔI</a:t>
-            </a:r>
-          </a:p>
-          <a:p>
-            <a:r>
-              <a:t>• Chia cặp mua – bán, phát phiếu thông tin riêng cho mỗi bên (có ngân sách và giá sàn khác nhau).</a:t>
-            </a:r>
-          </a:p>
-          <a:p>
-            <a:r>
-              <a:t>• 5 phút chuẩn bị: bắt buộc viết ra mục tiêu 3 mức và BATNA.</a:t>
-            </a:r>
-          </a:p>
-          <a:p>
-            <a:r>
-              <a:t>• 10 phút đàm phán, 5 phút chốt và rút kinh nghiệm.</a:t>
-            </a:r>
-          </a:p>
-          <a:p>
-            <a:r>
-              <a:t>• Cô đi quanh lớp quan sát, ghi lại 2–3 tình huống hay để phân tích chung.</a:t>
-            </a:r>
-          </a:p>
-          <a:p>
-            <a:r>
-              <a:t>• Chốt: hỏi các cặp đạt thỏa thuận xem họ đã mở rộng chiếc bánh bằng cách nào.</a:t>
+              <a:t>ROLE PLAY (20 minutes) — THE MAIN ACTIVITY OF THE SESSION</a:t>
+            </a:r>
+          </a:p>
+          <a:p>
+            <a:r>
+              <a:t>• Pairs, buyer and seller; hand each side its own briefing sheet (with different budgets and floor prices).</a:t>
+            </a:r>
+          </a:p>
+          <a:p>
+            <a:r>
+              <a:t>• 5 minutes to prepare: the three levels of objective and the BATNA must be written down.</a:t>
+            </a:r>
+          </a:p>
+          <a:p>
+            <a:r>
+              <a:t>• 10 minutes to negotiate, 5 minutes to close and debrief.</a:t>
+            </a:r>
+          </a:p>
+          <a:p>
+            <a:r>
+              <a:t>• Walk the room and note 2–3 good moments to analyse with everyone.</a:t>
+            </a:r>
+          </a:p>
+          <a:p>
+            <a:r>
+              <a:t>• To close: ask the pairs who reached agreement how they enlarged the pie.</a:t>
             </a:r>
           </a:p>
         </p:txBody>
@@ -1115,17 +1115,17 @@
           <a:lstStyle/>
           <a:p>
             <a:r>
-              <a:t>TỔNG KẾT (2 phút)</a:t>
-            </a:r>
-          </a:p>
-          <a:p>
-            <a:r>
-              <a:t>• Nhấn lại: thắng từ trước khi ngồi vào bàn; đàm phán về LỢI ÍCH; văn bản hóa kết quả.</a:t>
-            </a:r>
-          </a:p>
-          <a:p>
-            <a:r>
-              <a:t>• Giao việc: 40 câu trắc nghiệm Chương 4; đọc trước Chương 5.</a:t>
+              <a:t>SUMMARY (2 minutes)</a:t>
+            </a:r>
+          </a:p>
+          <a:p>
+            <a:r>
+              <a:t>• Say it again: you win before you sit down; negotiate over INTERESTS; put the result in writing.</a:t>
+            </a:r>
+          </a:p>
+          <a:p>
+            <a:r>
+              <a:t>• Set the work: the 40 multiple-choice questions for Chapter 4; read Chapter 5 in advance.</a:t>
             </a:r>
           </a:p>
         </p:txBody>
@@ -1211,7 +1211,7 @@
           <a:lstStyle/>
           <a:p>
             <a:r>
-              <a:t>ÔN TẬP (1 phút) — tự làm ở nhà.</a:t>
+              <a:t>REVISION (1 minute) — at home.</a:t>
             </a:r>
           </a:p>
         </p:txBody>
@@ -1297,7 +1297,7 @@
           <a:lstStyle/>
           <a:p>
             <a:r>
-              <a:t>TÀI LIỆU (1 phút) — nhắc tải Nghị định 30/2020 cho buổi sau.</a:t>
+              <a:t>READING (1 minute) — remind them to download Decree 30/2020 for the next session.</a:t>
             </a:r>
           </a:p>
         </p:txBody>
@@ -1383,22 +1383,22 @@
           <a:lstStyle/>
           <a:p>
             <a:r>
-              <a:t>CON SỐ CHUẨN BỊ (2 phút)</a:t>
-            </a:r>
-          </a:p>
-          <a:p>
-            <a:r>
-              <a:t>• Nhấn 70% — đây là con số sinh viên hay bất ngờ.</a:t>
-            </a:r>
-          </a:p>
-          <a:p>
-            <a:r>
-              <a:t>• Liên hệ: bài role-play cuối buổi sẽ chấm phần chuẩn bị (mục tiêu 3 mức + BATNA viết ra giấy).</a:t>
-            </a:r>
-          </a:p>
-          <a:p>
-            <a:r>
-              <a:t>• Câu chốt đọc chậm: "Không chuẩn bị chính là chuẩn bị để nhượng bộ."''</a:t>
+              <a:t>THE PREPARATION FIGURE (2 minutes)</a:t>
+            </a:r>
+          </a:p>
+          <a:p>
+            <a:r>
+              <a:t>• Press the 70% — this is the number that surprises students.</a:t>
+            </a:r>
+          </a:p>
+          <a:p>
+            <a:r>
+              <a:t>• Tie it in: the role play at the end of the session marks the preparation (the three levels plus a written BATNA).</a:t>
+            </a:r>
+          </a:p>
+          <a:p>
+            <a:r>
+              <a:t>• Read the closing line slowly: "Not preparing is preparing to concede."''</a:t>
             </a:r>
           </a:p>
         </p:txBody>
@@ -1468,7 +1468,7 @@
           <a:lstStyle/>
           <a:p>
             <a:r>
-              <a:t>CHUYỂN MỤC (30 giây).</a:t>
+              <a:t>SECTION CHANGE (30 seconds).</a:t>
             </a:r>
           </a:p>
         </p:txBody>
@@ -1538,22 +1538,22 @@
           <a:lstStyle/>
           <a:p>
             <a:r>
-              <a:t>TIẾN TRÌNH 5 GIAI ĐOẠN (2 phút)</a:t>
-            </a:r>
-          </a:p>
-          <a:p>
-            <a:r>
-              <a:t>• Đi lướt 5 giai đoạn, dừng lại ở giai đoạn 1.</a:t>
-            </a:r>
-          </a:p>
-          <a:p>
-            <a:r>
-              <a:t>• Nói con số: CHUẨN BỊ QUYẾT ĐỊNH 70% KẾT QUẢ.</a:t>
-            </a:r>
-          </a:p>
-          <a:p>
-            <a:r>
-              <a:t>• Câu chốt: "Không chuẩn bị chính là chuẩn bị để nhượng bộ."''</a:t>
+              <a:t>THE FIVE STAGES (2 minutes)</a:t>
+            </a:r>
+          </a:p>
+          <a:p>
+            <a:r>
+              <a:t>• Skim the five, then stop at stage 1.</a:t>
+            </a:r>
+          </a:p>
+          <a:p>
+            <a:r>
+              <a:t>• Say the figure out loud: PREPARATION DECIDES 70% OF THE OUTCOME.</a:t>
+            </a:r>
+          </a:p>
+          <a:p>
+            <a:r>
+              <a:t>• The closing line: "Not preparing is preparing to concede."''</a:t>
             </a:r>
           </a:p>
         </p:txBody>
@@ -1623,7 +1623,7 @@
           <a:lstStyle/>
           <a:p>
             <a:r>
-              <a:t>MỤC TIÊU (1 phút) — nhấn: cuối chương có role-play chấm điểm.</a:t>
+              <a:t>OBJECTIVES (1 minute) — press it: the chapter ends with a graded role play.</a:t>
             </a:r>
           </a:p>
         </p:txBody>
@@ -1709,7 +1709,7 @@
           <a:lstStyle/>
           <a:p>
             <a:r>
-              <a:t>CHUYỂN MỤC (30 giây).</a:t>
+              <a:t>SECTION CHANGE (30 seconds).</a:t>
             </a:r>
           </a:p>
         </p:txBody>
@@ -1779,7 +1779,7 @@
           <a:lstStyle/>
           <a:p>
             <a:r>
-              <a:t>LỘ TRÌNH (1 phút) — khái niệm, tiến trình 5 giai đoạn, kỹ năng.</a:t>
+              <a:t>THE MAP (1 minute) — the concept, the five stages, the skills.</a:t>
             </a:r>
           </a:p>
         </p:txBody>
@@ -1865,43 +1865,43 @@
           <a:lstStyle/>
           <a:p>
             <a:r>
-              <a:t>KHÁI NIỆM (3 phút)</a:t>
-            </a:r>
-          </a:p>
-          <a:p>
-            <a:r>
-              <a:t>• Nhấn BẢN CHẤT KÉP: vừa hợp tác (để chiếc bánh tồn tại) vừa cạnh tranh (khi chia bánh).</a:t>
-            </a:r>
-          </a:p>
-          <a:p>
-            <a:r>
-              <a:t>• Ba nguồn sức mạnh: THÔNG TIN – THỜI GIAN – THẾ LỰC (số lựa chọn thay thế).</a:t>
-            </a:r>
-          </a:p>
-          <a:p>
-            <a:r>
-              <a:t>• Ví dụ: người đang cần bán gấp luôn ở thế yếu — vì sao? (sức mạnh thời gian).</a:t>
+              <a:t>THE CONCEPT (3 minutes)</a:t>
+            </a:r>
+          </a:p>
+          <a:p>
+            <a:r>
+              <a:t>• Press the DOUBLE NATURE: cooperative (so there is a pie at all) and competitive (when it is divided).</a:t>
+            </a:r>
+          </a:p>
+          <a:p>
+            <a:r>
+              <a:t>• Three sources of strength: INFORMATION – TIME – LEVERAGE (how many alternatives you have).</a:t>
+            </a:r>
+          </a:p>
+          <a:p>
+            <a:r>
+              <a:t>• An example: someone who must sell in a hurry is always in the weaker position — why? (the power of time).</a:t>
             </a:r>
           </a:p>
           <a:p/>
           <a:p>
             <a:r>
-              <a:t>NÓI ĐỦ Ý (phần đã rút khỏi slide)</a:t>
-            </a:r>
-          </a:p>
-          <a:p>
-            <a:r>
-              <a:t>• Định nghĩa đủ: đàm phán là quá trình các bên vừa có lợi ích chung, vừa có lợi ích xung đột, cùng trao đổi và thuyết phục để đi đến một thỏa thuận mà các bên chấp nhận được.</a:t>
-            </a:r>
-          </a:p>
-          <a:p>
-            <a:r>
-              <a:t>• Bản chất kép: quên vế hợp tác thì mất đối tác, quên vế cạnh tranh thì chịu thiệt.</a:t>
-            </a:r>
-          </a:p>
-          <a:p>
-            <a:r>
-              <a:t>• Ba nguồn sức mạnh: THÔNG TIN — ai hiểu đối phương hơn; THỜI GIAN — ai ít bị ép tiến độ hơn; THẾ LỰC — ai có nhiều lựa chọn thay thế hơn.</a:t>
+              <a:t>THE FULL VERSION (moved off the slide)</a:t>
+            </a:r>
+          </a:p>
+          <a:p>
+            <a:r>
+              <a:t>• The full definition: negotiation is a process in which parties who have both shared and conflicting interests exchange and persuade their way to an agreement all of them can accept.</a:t>
+            </a:r>
+          </a:p>
+          <a:p>
+            <a:r>
+              <a:t>• The double nature: forget the cooperative half and you lose the partner; forget the competitive half and you take the loss.</a:t>
+            </a:r>
+          </a:p>
+          <a:p>
+            <a:r>
+              <a:t>• Three sources of strength: INFORMATION — who understands the other side better; TIME — who is under less pressure to finish; LEVERAGE — who has more alternatives.</a:t>
             </a:r>
           </a:p>
         </p:txBody>
@@ -1987,38 +1987,38 @@
           <a:lstStyle/>
           <a:p>
             <a:r>
-              <a:t>ĐẶC ĐIỂM (2 phút)</a:t>
-            </a:r>
-          </a:p>
-          <a:p>
-            <a:r>
-              <a:t>• 5 đặc điểm, đi nhanh.</a:t>
-            </a:r>
-          </a:p>
-          <a:p>
-            <a:r>
-              <a:t>• Nhấn đặc điểm THỎA THUẬN PHẢI ĐƯỢC VĂN BẢN HÓA — nối thẳng sang Chương 5.</a:t>
+              <a:t>DEFINING FEATURES (2 minutes)</a:t>
+            </a:r>
+          </a:p>
+          <a:p>
+            <a:r>
+              <a:t>• Five features, move quickly.</a:t>
+            </a:r>
+          </a:p>
+          <a:p>
+            <a:r>
+              <a:t>• Press AN AGREEMENT MUST BE PUT IN WRITING — this leads straight into Chapter 5.</a:t>
             </a:r>
           </a:p>
           <a:p/>
           <a:p>
             <a:r>
-              <a:t>NÓI ĐỦ Ý (phần đã rút khỏi slide)</a:t>
-            </a:r>
-          </a:p>
-          <a:p>
-            <a:r>
-              <a:t>• Nhà đàm phán giỏi biết rõ giới hạn của MÌNH và ước lượng được giới hạn của ĐỐI PHƯƠNG.</a:t>
-            </a:r>
-          </a:p>
-          <a:p>
-            <a:r>
-              <a:t>• Phong cách đàm phán Á – Âu khác nhau; thương vụ một lần khác hẳn quan hệ hợp tác lâu dài.</a:t>
-            </a:r>
-          </a:p>
-          <a:p>
-            <a:r>
-              <a:t>• Kết quả chỉ an toàn khi thành hợp đồng đúng thể thức — cầu nối sang Chương 5.</a:t>
+              <a:t>THE FULL VERSION (moved off the slide)</a:t>
+            </a:r>
+          </a:p>
+          <a:p>
+            <a:r>
+              <a:t>• A good negotiator knows their OWN limit exactly and can estimate the OTHER SIDE's.</a:t>
+            </a:r>
+          </a:p>
+          <a:p>
+            <a:r>
+              <a:t>• Asian and European negotiating styles differ; a one-off deal is nothing like a long partnership.</a:t>
+            </a:r>
+          </a:p>
+          <a:p>
+            <a:r>
+              <a:t>• The outcome is only safe once it is a properly formed contract — the bridge to Chapter 5.</a:t>
             </a:r>
           </a:p>
         </p:txBody>
@@ -2104,32 +2104,32 @@
           <a:lstStyle/>
           <a:p>
             <a:r>
-              <a:t>CÁC KIỂU ĐÀM PHÁN (4 phút)</a:t>
-            </a:r>
-          </a:p>
-          <a:p>
-            <a:r>
-              <a:t>• Kiểu MỀM – CỨNG – NGUYÊN TẮC. Vẽ bảng so sánh 3 cột lên bảng.</a:t>
-            </a:r>
-          </a:p>
-          <a:p>
-            <a:r>
-              <a:t>• Hỏi lớp: "Người Việt mình hay đàm phán theo kiểu nào?" (thường là mềm — ngại mất lòng).</a:t>
-            </a:r>
-          </a:p>
-          <a:p>
-            <a:r>
-              <a:t>• Nhấn kiểu NGUYÊN TẮC (Harvard): TÁCH CON NGƯỜI KHỎI VẤN ĐỀ; tập trung LỢI ÍCH chứ không cố thủ LẬP TRƯỜNG.</a:t>
-            </a:r>
-          </a:p>
-          <a:p>
-            <a:r>
-              <a:t>• Ví dụ kinh điển: hai chị em tranh quả cam — một người cần vỏ làm bánh, một người cần ruột vắt nước. Cắt đôi là giải pháp tồi. Hỏi lợi ích mới ra giải pháp tốt.</a:t>
-            </a:r>
-          </a:p>
-          <a:p>
-            <a:r>
-              <a:t>• Phân bổ ↔ tích hợp: làm chiếc bánh LỚN HƠN nhờ khác biệt về ưu tiên.</a:t>
+              <a:t>STYLES OF NEGOTIATION (4 minutes)</a:t>
+            </a:r>
+          </a:p>
+          <a:p>
+            <a:r>
+              <a:t>• SOFT – HARD – PRINCIPLED. Draw the three-column comparison on the board.</a:t>
+            </a:r>
+          </a:p>
+          <a:p>
+            <a:r>
+              <a:t>• Ask the class: "Which style do Vietnamese people tend to use?" (usually soft — a reluctance to displease).</a:t>
+            </a:r>
+          </a:p>
+          <a:p>
+            <a:r>
+              <a:t>• Press the PRINCIPLED style (Harvard): SEPARATE THE PEOPLE FROM THE PROBLEM; work on INTERESTS instead of digging into POSITIONS.</a:t>
+            </a:r>
+          </a:p>
+          <a:p>
+            <a:r>
+              <a:t>• The classic example: two sisters fight over an orange — one wants the peel for a cake, the other the flesh for juice. Cutting it in half is the poor answer. Ask about interests and the good answer appears.</a:t>
+            </a:r>
+          </a:p>
+          <a:p>
+            <a:r>
+              <a:t>• Distributive ↔ integrative: making the pie BIGGER out of differences in priority.</a:t>
             </a:r>
           </a:p>
         </p:txBody>
@@ -2303,58 +2303,58 @@
           <a:lstStyle/>
           <a:p>
             <a:r>
-              <a:t>CHUẨN BỊ: BATNA – ZOPA (5 phút) — PHẦN KHÓ NHẤT CHƯƠNG</a:t>
-            </a:r>
-          </a:p>
-          <a:p>
-            <a:r>
-              <a:t>• Mục tiêu 3 mức: LÝ TƯỞNG – KỲ VỌNG – TỐI THIỂU. Bắt sinh viên VIẾT RA GIẤY trước khi vào bàn.</a:t>
-            </a:r>
-          </a:p>
-          <a:p>
-            <a:r>
-              <a:t>• BATNA: giải thích chậm bằng ví dụ xin việc — bạn có sẵn một lời mời khác thì bạn tự tin hơn hẳn.</a:t>
-            </a:r>
-          </a:p>
-          <a:p>
-            <a:r>
-              <a:t>• Nhấn: BATNA MẠNH thì thế đàm phán vững; BATNA YẾU thì ĐỪNG ĐỂ LỘ.</a:t>
-            </a:r>
-          </a:p>
-          <a:p>
-            <a:r>
-              <a:t>• ZOPA: chỉ vào sơ đồ trên slide, đi theo trục tiền từ trái sang phải.</a:t>
-            </a:r>
-          </a:p>
-          <a:p>
-            <a:r>
-              <a:t>• Câu hỏi cho lớp: "Nếu không có ZOPA thì làm gì?" — đáp: mở rộng chiếc bánh (đổi số lượng, tiến độ, dịch vụ kèm), đừng ép giá.</a:t>
+              <a:t>PREPARATION: BATNA AND ZOPA (5 minutes) — THE HARDEST PART OF THE CHAPTER</a:t>
+            </a:r>
+          </a:p>
+          <a:p>
+            <a:r>
+              <a:t>• Three levels of objective: IDEAL – EXPECTED – MINIMUM. Make students WRITE THEM DOWN before they sit at the table.</a:t>
+            </a:r>
+          </a:p>
+          <a:p>
+            <a:r>
+              <a:t>• BATNA: explain it slowly with the job-hunting example — hold another offer and you are visibly more confident.</a:t>
+            </a:r>
+          </a:p>
+          <a:p>
+            <a:r>
+              <a:t>• Press: a STRONG BATNA makes your position solid; a WEAK BATNA is something you DON'T REVEAL.</a:t>
+            </a:r>
+          </a:p>
+          <a:p>
+            <a:r>
+              <a:t>• ZOPA: point at the diagram on the slide and walk the money axis left to right.</a:t>
+            </a:r>
+          </a:p>
+          <a:p>
+            <a:r>
+              <a:t>• A question for the class: "What if there is no ZOPA?" — the answer: enlarge the pie (change quantities, timing, added services) rather than squeeze the price.</a:t>
             </a:r>
           </a:p>
           <a:p/>
           <a:p>
             <a:r>
-              <a:t>NÓI ĐỦ Ý (phần đã rút khỏi slide)</a:t>
-            </a:r>
-          </a:p>
-          <a:p>
-            <a:r>
-              <a:t>• Ba mức mục tiêu: lý tưởng (mong muốn nhất) – kỳ vọng (hợp lý) – tối thiểu (ranh giới rút lui).</a:t>
-            </a:r>
-          </a:p>
-          <a:p>
-            <a:r>
-              <a:t>• BATNA = Best Alternative To a Negotiated Agreement. BATNA càng mạnh thế càng vững — và ĐỪNG ĐỂ LỘ khi BATNA yếu.</a:t>
-            </a:r>
-          </a:p>
-          <a:p>
-            <a:r>
-              <a:t>• ZOPA: ước lượng để biết đề nghị nào khả thi, đề nghị nào làm vỡ bàn đàm phán.</a:t>
-            </a:r>
-          </a:p>
-          <a:p>
-            <a:r>
-              <a:t>• Hiểu đối tác: nhu cầu thật đằng sau yêu cầu; ai là người có thẩm quyền quyết định.</a:t>
+              <a:t>THE FULL VERSION (moved off the slide)</a:t>
+            </a:r>
+          </a:p>
+          <a:p>
+            <a:r>
+              <a:t>• Three levels of objective: ideal (what you most want) – expected (what is reasonable) – minimum (the walk-away line).</a:t>
+            </a:r>
+          </a:p>
+          <a:p>
+            <a:r>
+              <a:t>• BATNA = Best Alternative To a Negotiated Agreement. The stronger it is the firmer you stand — and DON'T REVEAL it when it is weak.</a:t>
+            </a:r>
+          </a:p>
+          <a:p>
+            <a:r>
+              <a:t>• ZOPA: estimate it so you know which offers are workable and which will break the table.</a:t>
+            </a:r>
+          </a:p>
+          <a:p>
+            <a:r>
+              <a:t>• Understanding your counterpart: the real need behind the demand; who actually has authority to decide.</a:t>
             </a:r>
           </a:p>
         </p:txBody>
@@ -2440,58 +2440,58 @@
           <a:lstStyle/>
           <a:p>
             <a:r>
-              <a:t>THƯƠNG LƯỢNG (4 phút)</a:t>
-            </a:r>
-          </a:p>
-          <a:p>
-            <a:r>
-              <a:t>• Neo tâm lý: đề nghị đầu tiên CÓ CĂN CỨ sẽ định hình cả cuộc đàm phán.</a:t>
-            </a:r>
-          </a:p>
-          <a:p>
-            <a:r>
-              <a:t>• Khi bị neo: phản hồi bằng câu hỏi "Dựa trên cơ sở nào ạ?" — cho lớp tập nói câu này.</a:t>
-            </a:r>
-          </a:p>
-          <a:p>
-            <a:r>
-              <a:t>• NHƯỢNG BỘ CÓ ĐIỀU KIỆN: "Nếu anh tăng số lượng lên 500, chúng tôi giảm 3%." Không bao giờ cho không.</a:t>
-            </a:r>
-          </a:p>
-          <a:p>
-            <a:r>
-              <a:t>• Nhượng bộ NHỎ DẦN để phát tín hiệu đã chạm giới hạn.</a:t>
-            </a:r>
-          </a:p>
-          <a:p>
-            <a:r>
-              <a:t>• Bế tắc: tạm nghỉ – đổi người/vấn đề/cách tiếp cận – quay về lợi ích gốc – đưa tiêu chí khách quan.</a:t>
+              <a:t>BARGAINING (4 minutes)</a:t>
+            </a:r>
+          </a:p>
+          <a:p>
+            <a:r>
+              <a:t>• Anchoring: a first offer WITH A BASIS shapes the whole negotiation.</a:t>
+            </a:r>
+          </a:p>
+          <a:p>
+            <a:r>
+              <a:t>• When you are anchored: answer with a question — "On what basis?" — and have the class practise saying it.</a:t>
+            </a:r>
+          </a:p>
+          <a:p>
+            <a:r>
+              <a:t>• CONDITIONAL CONCESSIONS: "If you raise the order to 500, we'll take 3% off." Never give anything away free.</a:t>
+            </a:r>
+          </a:p>
+          <a:p>
+            <a:r>
+              <a:t>• Make each concession SMALLER than the last, to signal you have reached your limit.</a:t>
+            </a:r>
+          </a:p>
+          <a:p>
+            <a:r>
+              <a:t>• Deadlock: break – change the person, the issue, or the approach – go back to the underlying interests – bring in an objective standard.</a:t>
             </a:r>
           </a:p>
           <a:p/>
           <a:p>
             <a:r>
-              <a:t>NÓI ĐỦ Ý (phần đã rút khỏi slide)</a:t>
-            </a:r>
-          </a:p>
-          <a:p>
-            <a:r>
-              <a:t>• Vài phút xã giao đúng mực, vừa tạo không khí vừa quan sát thái độ.</a:t>
-            </a:r>
-          </a:p>
-          <a:p>
-            <a:r>
-              <a:t>• Đề nghị đầu tiên là cái neo tâm lý — nên phải có căn cứ.</a:t>
-            </a:r>
-          </a:p>
-          <a:p>
-            <a:r>
-              <a:t>• Nhượng bộ có điều kiện, ví dụ: “Nếu anh tăng số lượng lên 500, chúng tôi sẽ giảm 3%.” Nhượng bộ nhỏ dần để phát tín hiệu đã chạm giới hạn.</a:t>
-            </a:r>
-          </a:p>
-          <a:p>
-            <a:r>
-              <a:t>• Bế tắc: tạm nghỉ; đổi người, đổi vấn đề, đổi cách tiếp cận; quay về lợi ích gốc.</a:t>
+              <a:t>THE FULL VERSION (moved off the slide)</a:t>
+            </a:r>
+          </a:p>
+          <a:p>
+            <a:r>
+              <a:t>• A few minutes of proper small talk — it warms the room and lets you read their mood.</a:t>
+            </a:r>
+          </a:p>
+          <a:p>
+            <a:r>
+              <a:t>• The first offer is a psychological anchor — so it has to have a basis.</a:t>
+            </a:r>
+          </a:p>
+          <a:p>
+            <a:r>
+              <a:t>• Conditional concessions, for example: “If you raise the order to 500, we'll take 3% off.” Make them smaller each time to signal your limit.</a:t>
+            </a:r>
+          </a:p>
+          <a:p>
+            <a:r>
+              <a:t>• Deadlock: take a break; change the person, the issue, the approach; go back to the underlying interests.</a:t>
             </a:r>
           </a:p>
         </p:txBody>

--- a/slides-en/04-negotiation.pptx
+++ b/slides-en/04-negotiation.pptx
@@ -520,10 +520,18 @@
           <a:lstStyle/>
           <a:p>
             <a:r>
-              <a:rPr lang="en-US" dirty="0"/>
-              <a:t/>
-            </a:r>
-            <a:endParaRPr lang="en-US" dirty="0"/>
+              <a:t>OPENING (2 minutes)</a:t>
+            </a:r>
+          </a:p>
+          <a:p>
+            <a:r>
+              <a:t>• A strong way in: "In business you don't get what you deserve — you get what you NEGOTIATE."</a:t>
+            </a:r>
+          </a:p>
+          <a:p>
+            <a:r>
+              <a:t>• Ask the class: "Who has haggled over a price? That was already a negotiation."''</a:t>
+            </a:r>
           </a:p>
         </p:txBody>
       </p:sp>
@@ -1538,22 +1546,7 @@
           <a:lstStyle/>
           <a:p>
             <a:r>
-              <a:t>THE FIVE STAGES (2 minutes)</a:t>
-            </a:r>
-          </a:p>
-          <a:p>
-            <a:r>
-              <a:t>• Skim the five, then stop at stage 1.</a:t>
-            </a:r>
-          </a:p>
-          <a:p>
-            <a:r>
-              <a:t>• Say the figure out loud: PREPARATION DECIDES 70% OF THE OUTCOME.</a:t>
-            </a:r>
-          </a:p>
-          <a:p>
-            <a:r>
-              <a:t>• The closing line: "Not preparing is preparing to concede."''</a:t>
+              <a:t>SECTION CHANGE (30 seconds) — press the 70% figure right here on this slide.</a:t>
             </a:r>
           </a:p>
         </p:txBody>
@@ -2215,10 +2208,23 @@
           <a:lstStyle/>
           <a:p>
             <a:r>
-              <a:rPr lang="en-US" dirty="0"/>
-              <a:t/>
-            </a:r>
-            <a:endParaRPr lang="en-US" dirty="0"/>
+              <a:t>THE FIVE STAGES (2 minutes)</a:t>
+            </a:r>
+          </a:p>
+          <a:p>
+            <a:r>
+              <a:t>• Skim the five, then stop at stage 1.</a:t>
+            </a:r>
+          </a:p>
+          <a:p>
+            <a:r>
+              <a:t>• Say the figure out loud: PREPARATION DECIDES 70% OF THE OUTCOME.</a:t>
+            </a:r>
+          </a:p>
+          <a:p>
+            <a:r>
+              <a:t>• The closing line: "Not preparing is preparing to concede."''</a:t>
+            </a:r>
           </a:p>
         </p:txBody>
       </p:sp>
